--- a/practice-problems/practice-problems-4-corrected.pptx
+++ b/practice-problems/practice-problems-4-corrected.pptx
@@ -5237,7 +5237,7 @@
             <p:spPr>
               <a:xfrm>
                 <a:off x="395926" y="537328"/>
-                <a:ext cx="11510128" cy="3421514"/>
+                <a:ext cx="11510128" cy="5564216"/>
               </a:xfrm>
               <a:prstGeom prst="rect">
                 <a:avLst/>
@@ -5625,17 +5625,46 @@
                       </a:rPr>
                       <m:t>, </m:t>
                     </m:r>
-                    <m:r>
-                      <a:rPr lang="el-GR" sz="2400" i="1" dirty="0">
-                        <a:solidFill>
-                          <a:srgbClr val="7030A0"/>
-                        </a:solidFill>
-                        <a:latin typeface="Cambria Math" panose="02040503050406030204" pitchFamily="18" charset="0"/>
-                        <a:ea typeface="Yu Gothic" panose="020B0400000000000000" pitchFamily="34" charset="-128"/>
-                        <a:cs typeface="Times New Roman" panose="02020603050405020304" pitchFamily="18" charset="0"/>
-                      </a:rPr>
-                      <m:t>𝜁</m:t>
-                    </m:r>
+                    <m:sSup>
+                      <m:sSupPr>
+                        <m:ctrlPr>
+                          <a:rPr lang="el-GR" sz="2400" i="1" dirty="0">
+                            <a:solidFill>
+                              <a:srgbClr val="7030A0"/>
+                            </a:solidFill>
+                            <a:latin typeface="Cambria Math" panose="02040503050406030204" pitchFamily="18" charset="0"/>
+                            <a:ea typeface="Yu Gothic" panose="020B0400000000000000" pitchFamily="34" charset="-128"/>
+                            <a:cs typeface="Times New Roman" panose="02020603050405020304" pitchFamily="18" charset="0"/>
+                          </a:rPr>
+                        </m:ctrlPr>
+                      </m:sSupPr>
+                      <m:e>
+                        <m:r>
+                          <a:rPr lang="el-GR" sz="2400" i="1" dirty="0">
+                            <a:solidFill>
+                              <a:srgbClr val="7030A0"/>
+                            </a:solidFill>
+                            <a:latin typeface="Cambria Math" panose="02040503050406030204" pitchFamily="18" charset="0"/>
+                            <a:ea typeface="Yu Gothic" panose="020B0400000000000000" pitchFamily="34" charset="-128"/>
+                            <a:cs typeface="Times New Roman" panose="02020603050405020304" pitchFamily="18" charset="0"/>
+                          </a:rPr>
+                          <m:t>𝜁</m:t>
+                        </m:r>
+                      </m:e>
+                      <m:sup>
+                        <m:r>
+                          <a:rPr lang="en-US" sz="2400" b="0" i="1" dirty="0" smtClean="0">
+                            <a:solidFill>
+                              <a:srgbClr val="7030A0"/>
+                            </a:solidFill>
+                            <a:latin typeface="Cambria Math" panose="02040503050406030204" pitchFamily="18" charset="0"/>
+                            <a:ea typeface="Yu Gothic" panose="020B0400000000000000" pitchFamily="34" charset="-128"/>
+                            <a:cs typeface="Times New Roman" panose="02020603050405020304" pitchFamily="18" charset="0"/>
+                          </a:rPr>
+                          <m:t>2</m:t>
+                        </m:r>
+                      </m:sup>
+                    </m:sSup>
                     <m:r>
                       <a:rPr lang="en-US" sz="2400" i="1" dirty="0">
                         <a:solidFill>
@@ -5933,6 +5962,695 @@
                   <a:t> </a:t>
                 </a:r>
               </a:p>
+              <a:p>
+                <a:pPr algn="ctr"/>
+                <a:endParaRPr lang="en-US" sz="2400" dirty="0">
+                  <a:solidFill>
+                    <a:srgbClr val="7030A0"/>
+                  </a:solidFill>
+                  <a:latin typeface="Times New Roman" panose="02020603050405020304" pitchFamily="18" charset="0"/>
+                  <a:ea typeface="Yu Gothic" panose="020B0400000000000000" pitchFamily="34" charset="-128"/>
+                  <a:cs typeface="Times New Roman" panose="02020603050405020304" pitchFamily="18" charset="0"/>
+                </a:endParaRPr>
+              </a:p>
+              <a:p>
+                <a:pPr marL="457200" indent="-457200" defTabSz="685800">
+                  <a:buAutoNum type="arabicPeriod"/>
+                </a:pPr>
+                <a:r>
+                  <a:rPr lang="en-US" sz="2400" dirty="0">
+                    <a:solidFill>
+                      <a:srgbClr val="0000FF"/>
+                    </a:solidFill>
+                    <a:latin typeface="Times New Roman" panose="02020603050405020304" pitchFamily="18" charset="0"/>
+                    <a:cs typeface="Times New Roman" panose="02020603050405020304" pitchFamily="18" charset="0"/>
+                  </a:rPr>
+                  <a:t>Find </a:t>
+                </a:r>
+                <a14:m>
+                  <m:oMath xmlns:m="http://schemas.openxmlformats.org/officeDocument/2006/math">
+                    <m:r>
+                      <a:rPr lang="el-GR" sz="2400" i="1" dirty="0">
+                        <a:solidFill>
+                          <a:srgbClr val="0000FF"/>
+                        </a:solidFill>
+                        <a:latin typeface="Cambria Math" panose="02040503050406030204" pitchFamily="18" charset="0"/>
+                        <a:cs typeface="Times New Roman" panose="02020603050405020304" pitchFamily="18" charset="0"/>
+                      </a:rPr>
+                      <m:t>𝜆</m:t>
+                    </m:r>
+                    <m:r>
+                      <a:rPr lang="en-US" sz="2400" i="1" dirty="0">
+                        <a:solidFill>
+                          <a:srgbClr val="0000FF"/>
+                        </a:solidFill>
+                        <a:latin typeface="Cambria Math" panose="02040503050406030204" pitchFamily="18" charset="0"/>
+                        <a:cs typeface="Times New Roman" panose="02020603050405020304" pitchFamily="18" charset="0"/>
+                      </a:rPr>
+                      <m:t>=</m:t>
+                    </m:r>
+                    <m:func>
+                      <m:funcPr>
+                        <m:ctrlPr>
+                          <a:rPr lang="en-US" sz="2400" dirty="0">
+                            <a:solidFill>
+                              <a:srgbClr val="0000FF"/>
+                            </a:solidFill>
+                            <a:latin typeface="Cambria Math" panose="02040503050406030204" pitchFamily="18" charset="0"/>
+                            <a:cs typeface="Times New Roman" panose="02020603050405020304" pitchFamily="18" charset="0"/>
+                          </a:rPr>
+                        </m:ctrlPr>
+                      </m:funcPr>
+                      <m:fName>
+                        <m:r>
+                          <m:rPr>
+                            <m:sty m:val="p"/>
+                          </m:rPr>
+                          <a:rPr lang="en-US" sz="2400" dirty="0">
+                            <a:solidFill>
+                              <a:srgbClr val="0000FF"/>
+                            </a:solidFill>
+                            <a:latin typeface="Cambria Math" panose="02040503050406030204" pitchFamily="18" charset="0"/>
+                            <a:cs typeface="Times New Roman" panose="02020603050405020304" pitchFamily="18" charset="0"/>
+                          </a:rPr>
+                          <m:t>ln</m:t>
+                        </m:r>
+                      </m:fName>
+                      <m:e>
+                        <m:sSub>
+                          <m:sSubPr>
+                            <m:ctrlPr>
+                              <a:rPr lang="en-US" sz="2400" i="1" dirty="0">
+                                <a:solidFill>
+                                  <a:srgbClr val="0000FF"/>
+                                </a:solidFill>
+                                <a:latin typeface="Cambria Math" panose="02040503050406030204" pitchFamily="18" charset="0"/>
+                                <a:cs typeface="Times New Roman" panose="02020603050405020304" pitchFamily="18" charset="0"/>
+                              </a:rPr>
+                            </m:ctrlPr>
+                          </m:sSubPr>
+                          <m:e>
+                            <m:r>
+                              <a:rPr lang="en-US" sz="2400" i="1" dirty="0">
+                                <a:solidFill>
+                                  <a:srgbClr val="0000FF"/>
+                                </a:solidFill>
+                                <a:latin typeface="Cambria Math" panose="02040503050406030204" pitchFamily="18" charset="0"/>
+                                <a:cs typeface="Times New Roman" panose="02020603050405020304" pitchFamily="18" charset="0"/>
+                              </a:rPr>
+                              <m:t>𝑥</m:t>
+                            </m:r>
+                          </m:e>
+                          <m:sub>
+                            <m:r>
+                              <a:rPr lang="en-US" sz="2400" i="1" dirty="0">
+                                <a:solidFill>
+                                  <a:srgbClr val="0000FF"/>
+                                </a:solidFill>
+                                <a:latin typeface="Cambria Math" panose="02040503050406030204" pitchFamily="18" charset="0"/>
+                                <a:cs typeface="Times New Roman" panose="02020603050405020304" pitchFamily="18" charset="0"/>
+                              </a:rPr>
+                              <m:t>𝑚</m:t>
+                            </m:r>
+                          </m:sub>
+                        </m:sSub>
+                      </m:e>
+                    </m:func>
+                  </m:oMath>
+                </a14:m>
+                <a:r>
+                  <a:rPr lang="en-US" sz="2400" dirty="0">
+                    <a:solidFill>
+                      <a:srgbClr val="0000FF"/>
+                    </a:solidFill>
+                    <a:latin typeface="Times New Roman" panose="02020603050405020304" pitchFamily="18" charset="0"/>
+                    <a:cs typeface="Times New Roman" panose="02020603050405020304" pitchFamily="18" charset="0"/>
+                  </a:rPr>
+                  <a:t> 	</a:t>
+                </a:r>
+                <a:r>
+                  <a:rPr lang="en-US" sz="2400" dirty="0">
+                    <a:latin typeface="Times New Roman" panose="02020603050405020304" pitchFamily="18" charset="0"/>
+                    <a:cs typeface="Times New Roman" panose="02020603050405020304" pitchFamily="18" charset="0"/>
+                  </a:rPr>
+                  <a:t>and</a:t>
+                </a:r>
+                <a:r>
+                  <a:rPr lang="en-US" sz="2400" dirty="0">
+                    <a:solidFill>
+                      <a:srgbClr val="0000FF"/>
+                    </a:solidFill>
+                    <a:latin typeface="Times New Roman" panose="02020603050405020304" pitchFamily="18" charset="0"/>
+                    <a:cs typeface="Times New Roman" panose="02020603050405020304" pitchFamily="18" charset="0"/>
+                  </a:rPr>
+                  <a:t>	 </a:t>
+                </a:r>
+                <a14:m>
+                  <m:oMath xmlns:m="http://schemas.openxmlformats.org/officeDocument/2006/math">
+                    <m:r>
+                      <m:rPr>
+                        <m:sty m:val="p"/>
+                      </m:rPr>
+                      <a:rPr lang="en-US" sz="2400" i="1" dirty="0">
+                        <a:solidFill>
+                          <a:srgbClr val="0000FF"/>
+                        </a:solidFill>
+                        <a:latin typeface="Cambria Math" panose="02040503050406030204" pitchFamily="18" charset="0"/>
+                        <a:ea typeface="Yu Gothic" panose="020B0400000000000000" pitchFamily="34" charset="-128"/>
+                        <a:cs typeface="Times New Roman" panose="02020603050405020304" pitchFamily="18" charset="0"/>
+                      </a:rPr>
+                      <m:t>ζ</m:t>
+                    </m:r>
+                    <m:r>
+                      <a:rPr lang="en-US" sz="2400" i="1" dirty="0">
+                        <a:solidFill>
+                          <a:srgbClr val="0000FF"/>
+                        </a:solidFill>
+                        <a:latin typeface="Cambria Math" panose="02040503050406030204" pitchFamily="18" charset="0"/>
+                        <a:ea typeface="Yu Gothic" panose="020B0400000000000000" pitchFamily="34" charset="-128"/>
+                        <a:cs typeface="Times New Roman" panose="02020603050405020304" pitchFamily="18" charset="0"/>
+                      </a:rPr>
+                      <m:t>=</m:t>
+                    </m:r>
+                    <m:rad>
+                      <m:radPr>
+                        <m:degHide m:val="on"/>
+                        <m:ctrlPr>
+                          <a:rPr lang="en-US" sz="2400" i="1" dirty="0">
+                            <a:solidFill>
+                              <a:srgbClr val="0000FF"/>
+                            </a:solidFill>
+                            <a:latin typeface="Cambria Math" panose="02040503050406030204" pitchFamily="18" charset="0"/>
+                            <a:ea typeface="Yu Gothic" panose="020B0400000000000000" pitchFamily="34" charset="-128"/>
+                            <a:cs typeface="Times New Roman" panose="02020603050405020304" pitchFamily="18" charset="0"/>
+                          </a:rPr>
+                        </m:ctrlPr>
+                      </m:radPr>
+                      <m:deg/>
+                      <m:e>
+                        <m:r>
+                          <m:rPr>
+                            <m:sty m:val="p"/>
+                          </m:rPr>
+                          <a:rPr lang="en-US" sz="2400" i="1">
+                            <a:solidFill>
+                              <a:srgbClr val="0000FF"/>
+                            </a:solidFill>
+                            <a:latin typeface="Cambria Math" panose="02040503050406030204" pitchFamily="18" charset="0"/>
+                            <a:ea typeface="Yu Gothic" panose="020B0400000000000000" pitchFamily="34" charset="-128"/>
+                            <a:cs typeface="Times New Roman" panose="02020603050405020304" pitchFamily="18" charset="0"/>
+                          </a:rPr>
+                          <m:t>ln</m:t>
+                        </m:r>
+                        <m:r>
+                          <a:rPr lang="en-US" sz="2400">
+                            <a:solidFill>
+                              <a:srgbClr val="0000FF"/>
+                            </a:solidFill>
+                            <a:latin typeface="Cambria Math" panose="02040503050406030204" pitchFamily="18" charset="0"/>
+                            <a:ea typeface="Yu Gothic" panose="020B0400000000000000" pitchFamily="34" charset="-128"/>
+                            <a:cs typeface="Times New Roman" panose="02020603050405020304" pitchFamily="18" charset="0"/>
+                          </a:rPr>
+                          <m:t> </m:t>
+                        </m:r>
+                        <m:d>
+                          <m:dPr>
+                            <m:ctrlPr>
+                              <a:rPr lang="en-US" sz="2400" i="1">
+                                <a:solidFill>
+                                  <a:srgbClr val="0000FF"/>
+                                </a:solidFill>
+                                <a:latin typeface="Cambria Math" panose="02040503050406030204" pitchFamily="18" charset="0"/>
+                                <a:ea typeface="Yu Gothic" panose="020B0400000000000000" pitchFamily="34" charset="-128"/>
+                                <a:cs typeface="Times New Roman" panose="02020603050405020304" pitchFamily="18" charset="0"/>
+                              </a:rPr>
+                            </m:ctrlPr>
+                          </m:dPr>
+                          <m:e>
+                            <m:r>
+                              <a:rPr lang="en-US" sz="2400" i="1">
+                                <a:solidFill>
+                                  <a:srgbClr val="0000FF"/>
+                                </a:solidFill>
+                                <a:latin typeface="Cambria Math" panose="02040503050406030204" pitchFamily="18" charset="0"/>
+                                <a:ea typeface="Yu Gothic" panose="020B0400000000000000" pitchFamily="34" charset="-128"/>
+                                <a:cs typeface="Times New Roman" panose="02020603050405020304" pitchFamily="18" charset="0"/>
+                              </a:rPr>
+                              <m:t>1+</m:t>
+                            </m:r>
+                            <m:sSubSup>
+                              <m:sSubSupPr>
+                                <m:ctrlPr>
+                                  <a:rPr lang="en-US" sz="2400" i="1">
+                                    <a:solidFill>
+                                      <a:srgbClr val="0000FF"/>
+                                    </a:solidFill>
+                                    <a:latin typeface="Cambria Math" panose="02040503050406030204" pitchFamily="18" charset="0"/>
+                                    <a:ea typeface="Yu Gothic" panose="020B0400000000000000" pitchFamily="34" charset="-128"/>
+                                    <a:cs typeface="Times New Roman" panose="02020603050405020304" pitchFamily="18" charset="0"/>
+                                  </a:rPr>
+                                </m:ctrlPr>
+                              </m:sSubSupPr>
+                              <m:e>
+                                <m:r>
+                                  <a:rPr lang="en-US" sz="2400" i="1">
+                                    <a:solidFill>
+                                      <a:srgbClr val="0000FF"/>
+                                    </a:solidFill>
+                                    <a:latin typeface="Cambria Math" panose="02040503050406030204" pitchFamily="18" charset="0"/>
+                                    <a:ea typeface="Yu Gothic" panose="020B0400000000000000" pitchFamily="34" charset="-128"/>
+                                    <a:cs typeface="Times New Roman" panose="02020603050405020304" pitchFamily="18" charset="0"/>
+                                  </a:rPr>
+                                  <m:t>𝛿</m:t>
+                                </m:r>
+                              </m:e>
+                              <m:sub>
+                                <m:r>
+                                  <a:rPr lang="en-US" sz="2400" i="1">
+                                    <a:solidFill>
+                                      <a:srgbClr val="0000FF"/>
+                                    </a:solidFill>
+                                    <a:latin typeface="Cambria Math" panose="02040503050406030204" pitchFamily="18" charset="0"/>
+                                    <a:ea typeface="Yu Gothic" panose="020B0400000000000000" pitchFamily="34" charset="-128"/>
+                                    <a:cs typeface="Times New Roman" panose="02020603050405020304" pitchFamily="18" charset="0"/>
+                                  </a:rPr>
+                                  <m:t>𝑋</m:t>
+                                </m:r>
+                              </m:sub>
+                              <m:sup>
+                                <m:r>
+                                  <a:rPr lang="en-US" sz="2400" i="1">
+                                    <a:solidFill>
+                                      <a:srgbClr val="0000FF"/>
+                                    </a:solidFill>
+                                    <a:latin typeface="Cambria Math" panose="02040503050406030204" pitchFamily="18" charset="0"/>
+                                    <a:ea typeface="Yu Gothic" panose="020B0400000000000000" pitchFamily="34" charset="-128"/>
+                                    <a:cs typeface="Times New Roman" panose="02020603050405020304" pitchFamily="18" charset="0"/>
+                                  </a:rPr>
+                                  <m:t>2</m:t>
+                                </m:r>
+                              </m:sup>
+                            </m:sSubSup>
+                          </m:e>
+                        </m:d>
+                      </m:e>
+                    </m:rad>
+                  </m:oMath>
+                </a14:m>
+                <a:endParaRPr lang="en-US" sz="2400" dirty="0">
+                  <a:solidFill>
+                    <a:srgbClr val="0000FF"/>
+                  </a:solidFill>
+                  <a:latin typeface="Times New Roman" panose="02020603050405020304" pitchFamily="18" charset="0"/>
+                  <a:ea typeface="Yu Gothic" panose="020B0400000000000000" pitchFamily="34" charset="-128"/>
+                  <a:cs typeface="Times New Roman" panose="02020603050405020304" pitchFamily="18" charset="0"/>
+                </a:endParaRPr>
+              </a:p>
+              <a:p>
+                <a:pPr marL="457200" indent="-457200" defTabSz="685800">
+                  <a:buAutoNum type="arabicPeriod"/>
+                </a:pPr>
+                <a:r>
+                  <a:rPr lang="en-US" sz="2400" dirty="0">
+                    <a:solidFill>
+                      <a:srgbClr val="0000FF"/>
+                    </a:solidFill>
+                    <a:latin typeface="Times New Roman" panose="02020603050405020304" pitchFamily="18" charset="0"/>
+                    <a:ea typeface="Yu Gothic" panose="020B0400000000000000" pitchFamily="34" charset="-128"/>
+                    <a:cs typeface="Times New Roman" panose="02020603050405020304" pitchFamily="18" charset="0"/>
+                  </a:rPr>
+                  <a:t>Find </a:t>
+                </a:r>
+                <a14:m>
+                  <m:oMath xmlns:m="http://schemas.openxmlformats.org/officeDocument/2006/math">
+                    <m:sSub>
+                      <m:sSubPr>
+                        <m:ctrlPr>
+                          <a:rPr lang="en-US" sz="2400" i="1">
+                            <a:solidFill>
+                              <a:srgbClr val="0000FF"/>
+                            </a:solidFill>
+                            <a:latin typeface="Cambria Math" panose="02040503050406030204" pitchFamily="18" charset="0"/>
+                            <a:ea typeface="Yu Gothic" panose="020B0400000000000000" pitchFamily="34" charset="-128"/>
+                            <a:cs typeface="Times New Roman" panose="02020603050405020304" pitchFamily="18" charset="0"/>
+                          </a:rPr>
+                        </m:ctrlPr>
+                      </m:sSubPr>
+                      <m:e>
+                        <m:r>
+                          <a:rPr lang="en-US" sz="2400" i="1">
+                            <a:solidFill>
+                              <a:srgbClr val="0000FF"/>
+                            </a:solidFill>
+                            <a:latin typeface="Cambria Math" panose="02040503050406030204" pitchFamily="18" charset="0"/>
+                            <a:ea typeface="Yu Gothic" panose="020B0400000000000000" pitchFamily="34" charset="-128"/>
+                            <a:cs typeface="Times New Roman" panose="02020603050405020304" pitchFamily="18" charset="0"/>
+                          </a:rPr>
+                          <m:t>𝑡</m:t>
+                        </m:r>
+                      </m:e>
+                      <m:sub>
+                        <m:r>
+                          <a:rPr lang="en-US" sz="2400" i="1">
+                            <a:solidFill>
+                              <a:srgbClr val="0000FF"/>
+                            </a:solidFill>
+                            <a:latin typeface="Cambria Math" panose="02040503050406030204" pitchFamily="18" charset="0"/>
+                            <a:ea typeface="Yu Gothic" panose="020B0400000000000000" pitchFamily="34" charset="-128"/>
+                            <a:cs typeface="Times New Roman" panose="02020603050405020304" pitchFamily="18" charset="0"/>
+                          </a:rPr>
+                          <m:t>0</m:t>
+                        </m:r>
+                      </m:sub>
+                    </m:sSub>
+                  </m:oMath>
+                </a14:m>
+                <a:r>
+                  <a:rPr lang="en-US" sz="2400" dirty="0">
+                    <a:solidFill>
+                      <a:srgbClr val="0000FF"/>
+                    </a:solidFill>
+                    <a:latin typeface="Times New Roman" panose="02020603050405020304" pitchFamily="18" charset="0"/>
+                    <a:ea typeface="Yu Gothic" panose="020B0400000000000000" pitchFamily="34" charset="-128"/>
+                    <a:cs typeface="Times New Roman" panose="02020603050405020304" pitchFamily="18" charset="0"/>
+                  </a:rPr>
+                  <a:t> such that </a:t>
+                </a:r>
+                <a14:m>
+                  <m:oMath xmlns:m="http://schemas.openxmlformats.org/officeDocument/2006/math">
+                    <m:r>
+                      <m:rPr>
+                        <m:sty m:val="p"/>
+                      </m:rPr>
+                      <a:rPr lang="en-US" sz="2400" dirty="0">
+                        <a:solidFill>
+                          <a:srgbClr val="0000FF"/>
+                        </a:solidFill>
+                        <a:latin typeface="Cambria Math" panose="02040503050406030204" pitchFamily="18" charset="0"/>
+                        <a:ea typeface="Yu Gothic" panose="020B0400000000000000" pitchFamily="34" charset="-128"/>
+                        <a:cs typeface="Times New Roman" panose="02020603050405020304" pitchFamily="18" charset="0"/>
+                      </a:rPr>
+                      <m:t>Pr</m:t>
+                    </m:r>
+                    <m:d>
+                      <m:dPr>
+                        <m:ctrlPr>
+                          <a:rPr lang="en-US" sz="2400" i="1" dirty="0">
+                            <a:solidFill>
+                              <a:srgbClr val="0000FF"/>
+                            </a:solidFill>
+                            <a:latin typeface="Cambria Math" panose="02040503050406030204" pitchFamily="18" charset="0"/>
+                            <a:ea typeface="Yu Gothic" panose="020B0400000000000000" pitchFamily="34" charset="-128"/>
+                            <a:cs typeface="Times New Roman" panose="02020603050405020304" pitchFamily="18" charset="0"/>
+                          </a:rPr>
+                        </m:ctrlPr>
+                      </m:dPr>
+                      <m:e>
+                        <m:r>
+                          <a:rPr lang="en-US" sz="2400" i="1" dirty="0">
+                            <a:solidFill>
+                              <a:srgbClr val="0000FF"/>
+                            </a:solidFill>
+                            <a:latin typeface="Cambria Math" panose="02040503050406030204" pitchFamily="18" charset="0"/>
+                            <a:ea typeface="Yu Gothic" panose="020B0400000000000000" pitchFamily="34" charset="-128"/>
+                            <a:cs typeface="Times New Roman" panose="02020603050405020304" pitchFamily="18" charset="0"/>
+                          </a:rPr>
+                          <m:t>𝑇</m:t>
+                        </m:r>
+                        <m:r>
+                          <a:rPr lang="en-US" sz="2400" i="1" dirty="0">
+                            <a:solidFill>
+                              <a:srgbClr val="0000FF"/>
+                            </a:solidFill>
+                            <a:latin typeface="Cambria Math" panose="02040503050406030204" pitchFamily="18" charset="0"/>
+                            <a:ea typeface="Yu Gothic" panose="020B0400000000000000" pitchFamily="34" charset="-128"/>
+                            <a:cs typeface="Times New Roman" panose="02020603050405020304" pitchFamily="18" charset="0"/>
+                          </a:rPr>
+                          <m:t>≤</m:t>
+                        </m:r>
+                        <m:sSub>
+                          <m:sSubPr>
+                            <m:ctrlPr>
+                              <a:rPr lang="en-US" sz="2400" i="1" dirty="0">
+                                <a:solidFill>
+                                  <a:srgbClr val="0000FF"/>
+                                </a:solidFill>
+                                <a:latin typeface="Cambria Math" panose="02040503050406030204" pitchFamily="18" charset="0"/>
+                                <a:ea typeface="Yu Gothic" panose="020B0400000000000000" pitchFamily="34" charset="-128"/>
+                                <a:cs typeface="Times New Roman" panose="02020603050405020304" pitchFamily="18" charset="0"/>
+                              </a:rPr>
+                            </m:ctrlPr>
+                          </m:sSubPr>
+                          <m:e>
+                            <m:r>
+                              <a:rPr lang="en-US" sz="2400" i="1" dirty="0">
+                                <a:solidFill>
+                                  <a:srgbClr val="0000FF"/>
+                                </a:solidFill>
+                                <a:latin typeface="Cambria Math" panose="02040503050406030204" pitchFamily="18" charset="0"/>
+                                <a:ea typeface="Yu Gothic" panose="020B0400000000000000" pitchFamily="34" charset="-128"/>
+                                <a:cs typeface="Times New Roman" panose="02020603050405020304" pitchFamily="18" charset="0"/>
+                              </a:rPr>
+                              <m:t>𝑡</m:t>
+                            </m:r>
+                          </m:e>
+                          <m:sub>
+                            <m:r>
+                              <a:rPr lang="en-US" sz="2400" i="1" dirty="0">
+                                <a:solidFill>
+                                  <a:srgbClr val="0000FF"/>
+                                </a:solidFill>
+                                <a:latin typeface="Cambria Math" panose="02040503050406030204" pitchFamily="18" charset="0"/>
+                                <a:ea typeface="Yu Gothic" panose="020B0400000000000000" pitchFamily="34" charset="-128"/>
+                                <a:cs typeface="Times New Roman" panose="02020603050405020304" pitchFamily="18" charset="0"/>
+                              </a:rPr>
+                              <m:t>0</m:t>
+                            </m:r>
+                          </m:sub>
+                        </m:sSub>
+                      </m:e>
+                    </m:d>
+                    <m:r>
+                      <a:rPr lang="en-US" sz="2400" i="1" dirty="0">
+                        <a:solidFill>
+                          <a:srgbClr val="0000FF"/>
+                        </a:solidFill>
+                        <a:latin typeface="Cambria Math" panose="02040503050406030204" pitchFamily="18" charset="0"/>
+                        <a:ea typeface="Yu Gothic" panose="020B0400000000000000" pitchFamily="34" charset="-128"/>
+                        <a:cs typeface="Times New Roman" panose="02020603050405020304" pitchFamily="18" charset="0"/>
+                      </a:rPr>
+                      <m:t>=</m:t>
+                    </m:r>
+                    <m:r>
+                      <m:rPr>
+                        <m:sty m:val="p"/>
+                      </m:rPr>
+                      <a:rPr lang="en-US" sz="2400" dirty="0">
+                        <a:solidFill>
+                          <a:srgbClr val="0000FF"/>
+                        </a:solidFill>
+                        <a:latin typeface="Cambria Math" panose="02040503050406030204" pitchFamily="18" charset="0"/>
+                        <a:ea typeface="Yu Gothic" panose="020B0400000000000000" pitchFamily="34" charset="-128"/>
+                        <a:cs typeface="Times New Roman" panose="02020603050405020304" pitchFamily="18" charset="0"/>
+                      </a:rPr>
+                      <m:t>Φ</m:t>
+                    </m:r>
+                    <m:d>
+                      <m:dPr>
+                        <m:begChr m:val="["/>
+                        <m:endChr m:val="]"/>
+                        <m:ctrlPr>
+                          <a:rPr lang="en-US" sz="2400" i="1">
+                            <a:solidFill>
+                              <a:srgbClr val="0000FF"/>
+                            </a:solidFill>
+                            <a:latin typeface="Cambria Math" panose="02040503050406030204" pitchFamily="18" charset="0"/>
+                            <a:ea typeface="Yu Gothic" panose="020B0400000000000000" pitchFamily="34" charset="-128"/>
+                            <a:cs typeface="Times New Roman" panose="02020603050405020304" pitchFamily="18" charset="0"/>
+                          </a:rPr>
+                        </m:ctrlPr>
+                      </m:dPr>
+                      <m:e>
+                        <m:f>
+                          <m:fPr>
+                            <m:ctrlPr>
+                              <a:rPr lang="en-US" sz="2400" i="1">
+                                <a:solidFill>
+                                  <a:srgbClr val="0000FF"/>
+                                </a:solidFill>
+                                <a:latin typeface="Cambria Math" panose="02040503050406030204" pitchFamily="18" charset="0"/>
+                                <a:ea typeface="Yu Gothic" panose="020B0400000000000000" pitchFamily="34" charset="-128"/>
+                                <a:cs typeface="Times New Roman" panose="02020603050405020304" pitchFamily="18" charset="0"/>
+                              </a:rPr>
+                            </m:ctrlPr>
+                          </m:fPr>
+                          <m:num>
+                            <m:func>
+                              <m:funcPr>
+                                <m:ctrlPr>
+                                  <a:rPr lang="en-US" sz="2400">
+                                    <a:solidFill>
+                                      <a:srgbClr val="0000FF"/>
+                                    </a:solidFill>
+                                    <a:latin typeface="Cambria Math" panose="02040503050406030204" pitchFamily="18" charset="0"/>
+                                    <a:ea typeface="Yu Gothic" panose="020B0400000000000000" pitchFamily="34" charset="-128"/>
+                                    <a:cs typeface="Times New Roman" panose="02020603050405020304" pitchFamily="18" charset="0"/>
+                                  </a:rPr>
+                                </m:ctrlPr>
+                              </m:funcPr>
+                              <m:fName>
+                                <m:r>
+                                  <m:rPr>
+                                    <m:sty m:val="p"/>
+                                  </m:rPr>
+                                  <a:rPr lang="en-US" sz="2400">
+                                    <a:solidFill>
+                                      <a:srgbClr val="0000FF"/>
+                                    </a:solidFill>
+                                    <a:latin typeface="Cambria Math" panose="02040503050406030204" pitchFamily="18" charset="0"/>
+                                    <a:ea typeface="Yu Gothic" panose="020B0400000000000000" pitchFamily="34" charset="-128"/>
+                                    <a:cs typeface="Times New Roman" panose="02020603050405020304" pitchFamily="18" charset="0"/>
+                                  </a:rPr>
+                                  <m:t>ln</m:t>
+                                </m:r>
+                              </m:fName>
+                              <m:e>
+                                <m:sSub>
+                                  <m:sSubPr>
+                                    <m:ctrlPr>
+                                      <a:rPr lang="en-US" sz="2400" i="1">
+                                        <a:solidFill>
+                                          <a:srgbClr val="0000FF"/>
+                                        </a:solidFill>
+                                        <a:latin typeface="Cambria Math" panose="02040503050406030204" pitchFamily="18" charset="0"/>
+                                        <a:ea typeface="Yu Gothic" panose="020B0400000000000000" pitchFamily="34" charset="-128"/>
+                                        <a:cs typeface="Times New Roman" panose="02020603050405020304" pitchFamily="18" charset="0"/>
+                                      </a:rPr>
+                                    </m:ctrlPr>
+                                  </m:sSubPr>
+                                  <m:e>
+                                    <m:r>
+                                      <a:rPr lang="en-US" sz="2400" i="1">
+                                        <a:solidFill>
+                                          <a:srgbClr val="0000FF"/>
+                                        </a:solidFill>
+                                        <a:latin typeface="Cambria Math" panose="02040503050406030204" pitchFamily="18" charset="0"/>
+                                        <a:ea typeface="Yu Gothic" panose="020B0400000000000000" pitchFamily="34" charset="-128"/>
+                                        <a:cs typeface="Times New Roman" panose="02020603050405020304" pitchFamily="18" charset="0"/>
+                                      </a:rPr>
+                                      <m:t>𝑡</m:t>
+                                    </m:r>
+                                  </m:e>
+                                  <m:sub>
+                                    <m:r>
+                                      <a:rPr lang="en-US" sz="2400" i="1">
+                                        <a:solidFill>
+                                          <a:srgbClr val="0000FF"/>
+                                        </a:solidFill>
+                                        <a:latin typeface="Cambria Math" panose="02040503050406030204" pitchFamily="18" charset="0"/>
+                                        <a:ea typeface="Yu Gothic" panose="020B0400000000000000" pitchFamily="34" charset="-128"/>
+                                        <a:cs typeface="Times New Roman" panose="02020603050405020304" pitchFamily="18" charset="0"/>
+                                      </a:rPr>
+                                      <m:t>0</m:t>
+                                    </m:r>
+                                  </m:sub>
+                                </m:sSub>
+                                <m:r>
+                                  <a:rPr lang="en-US" sz="2400" i="1">
+                                    <a:solidFill>
+                                      <a:srgbClr val="0000FF"/>
+                                    </a:solidFill>
+                                    <a:latin typeface="Cambria Math" panose="02040503050406030204" pitchFamily="18" charset="0"/>
+                                    <a:ea typeface="Yu Gothic" panose="020B0400000000000000" pitchFamily="34" charset="-128"/>
+                                    <a:cs typeface="Times New Roman" panose="02020603050405020304" pitchFamily="18" charset="0"/>
+                                  </a:rPr>
+                                  <m:t>−</m:t>
+                                </m:r>
+                                <m:r>
+                                  <a:rPr lang="en-US" sz="2400" i="1">
+                                    <a:solidFill>
+                                      <a:srgbClr val="0000FF"/>
+                                    </a:solidFill>
+                                    <a:latin typeface="Cambria Math" panose="02040503050406030204" pitchFamily="18" charset="0"/>
+                                    <a:ea typeface="Yu Gothic" panose="020B0400000000000000" pitchFamily="34" charset="-128"/>
+                                    <a:cs typeface="Times New Roman" panose="02020603050405020304" pitchFamily="18" charset="0"/>
+                                  </a:rPr>
+                                  <m:t>𝜆</m:t>
+                                </m:r>
+                                <m:r>
+                                  <a:rPr lang="en-US" sz="2400" i="1">
+                                    <a:solidFill>
+                                      <a:srgbClr val="0000FF"/>
+                                    </a:solidFill>
+                                    <a:latin typeface="Cambria Math" panose="02040503050406030204" pitchFamily="18" charset="0"/>
+                                    <a:ea typeface="Yu Gothic" panose="020B0400000000000000" pitchFamily="34" charset="-128"/>
+                                    <a:cs typeface="Times New Roman" panose="02020603050405020304" pitchFamily="18" charset="0"/>
+                                  </a:rPr>
+                                  <m:t> </m:t>
+                                </m:r>
+                              </m:e>
+                            </m:func>
+                          </m:num>
+                          <m:den>
+                            <m:r>
+                              <a:rPr lang="en-US" sz="2400" i="1">
+                                <a:solidFill>
+                                  <a:srgbClr val="0000FF"/>
+                                </a:solidFill>
+                                <a:latin typeface="Cambria Math" panose="02040503050406030204" pitchFamily="18" charset="0"/>
+                                <a:ea typeface="Yu Gothic" panose="020B0400000000000000" pitchFamily="34" charset="-128"/>
+                                <a:cs typeface="Times New Roman" panose="02020603050405020304" pitchFamily="18" charset="0"/>
+                              </a:rPr>
+                              <m:t>𝜁</m:t>
+                            </m:r>
+                          </m:den>
+                        </m:f>
+                      </m:e>
+                    </m:d>
+                    <m:r>
+                      <a:rPr lang="en-US" sz="2400" i="1" dirty="0">
+                        <a:solidFill>
+                          <a:srgbClr val="0000FF"/>
+                        </a:solidFill>
+                        <a:latin typeface="Cambria Math" panose="02040503050406030204" pitchFamily="18" charset="0"/>
+                        <a:ea typeface="Yu Gothic" panose="020B0400000000000000" pitchFamily="34" charset="-128"/>
+                        <a:cs typeface="Times New Roman" panose="02020603050405020304" pitchFamily="18" charset="0"/>
+                      </a:rPr>
+                      <m:t>=1−0.95=0.05</m:t>
+                    </m:r>
+                  </m:oMath>
+                </a14:m>
+                <a:endParaRPr lang="en-IN" sz="2400" dirty="0">
+                  <a:solidFill>
+                    <a:srgbClr val="0000FF"/>
+                  </a:solidFill>
+                  <a:latin typeface="Arial" panose="020B0604020202020204" pitchFamily="34" charset="0"/>
+                  <a:cs typeface="Arial" panose="020B0604020202020204" pitchFamily="34" charset="0"/>
+                </a:endParaRPr>
+              </a:p>
+              <a:p>
+                <a:pPr marL="457200" indent="-457200" defTabSz="685800">
+                  <a:buAutoNum type="arabicPeriod"/>
+                </a:pPr>
+                <a:endParaRPr lang="en-IN" sz="2400" dirty="0">
+                  <a:solidFill>
+                    <a:srgbClr val="0000FF"/>
+                  </a:solidFill>
+                  <a:latin typeface="Arial" panose="020B0604020202020204" pitchFamily="34" charset="0"/>
+                  <a:cs typeface="Arial" panose="020B0604020202020204" pitchFamily="34" charset="0"/>
+                </a:endParaRPr>
+              </a:p>
+              <a:p>
+                <a:pPr algn="ctr"/>
+                <a:endParaRPr lang="en-US" sz="2400" dirty="0">
+                  <a:solidFill>
+                    <a:srgbClr val="7030A0"/>
+                  </a:solidFill>
+                  <a:latin typeface="Times New Roman" panose="02020603050405020304" pitchFamily="18" charset="0"/>
+                  <a:ea typeface="Yu Gothic" panose="020B0400000000000000" pitchFamily="34" charset="-128"/>
+                  <a:cs typeface="Times New Roman" panose="02020603050405020304" pitchFamily="18" charset="0"/>
+                </a:endParaRPr>
+              </a:p>
             </p:txBody>
           </p:sp>
         </mc:Choice>
@@ -5954,7 +6672,7 @@
             <p:spPr>
               <a:xfrm>
                 <a:off x="395926" y="537328"/>
-                <a:ext cx="11510128" cy="3421514"/>
+                <a:ext cx="11510128" cy="5564216"/>
               </a:xfrm>
               <a:prstGeom prst="rect">
                 <a:avLst/>
@@ -5962,899 +6680,7 @@
               <a:blipFill>
                 <a:blip r:embed="rId2"/>
                 <a:stretch>
-                  <a:fillRect l="-847" t="-1426" b="-1783"/>
-                </a:stretch>
-              </a:blipFill>
-            </p:spPr>
-            <p:txBody>
-              <a:bodyPr/>
-              <a:lstStyle/>
-              <a:p>
-                <a:r>
-                  <a:rPr lang="en-US">
-                    <a:noFill/>
-                  </a:rPr>
-                  <a:t> </a:t>
-                </a:r>
-              </a:p>
-            </p:txBody>
-          </p:sp>
-        </mc:Fallback>
-      </mc:AlternateContent>
-      <mc:AlternateContent xmlns:mc="http://schemas.openxmlformats.org/markup-compatibility/2006">
-        <mc:Choice xmlns:a14="http://schemas.microsoft.com/office/drawing/2010/main" Requires="a14">
-          <p:sp>
-            <p:nvSpPr>
-              <p:cNvPr id="4" name="TextBox 3">
-                <a:extLst>
-                  <a:ext uri="{FF2B5EF4-FFF2-40B4-BE49-F238E27FC236}">
-                    <a16:creationId xmlns:a16="http://schemas.microsoft.com/office/drawing/2014/main" id="{A4180BF0-8840-B2F1-A15D-14388081D309}"/>
-                  </a:ext>
-                </a:extLst>
-              </p:cNvPr>
-              <p:cNvSpPr txBox="1"/>
-              <p:nvPr/>
-            </p:nvSpPr>
-            <p:spPr>
-              <a:xfrm>
-                <a:off x="3305740" y="4546299"/>
-                <a:ext cx="8025384" cy="1572610"/>
-              </a:xfrm>
-              <a:prstGeom prst="rect">
-                <a:avLst/>
-              </a:prstGeom>
-              <a:noFill/>
-            </p:spPr>
-            <p:txBody>
-              <a:bodyPr wrap="square" rtlCol="0">
-                <a:spAutoFit/>
-              </a:bodyPr>
-              <a:lstStyle/>
-              <a:p>
-                <a:pPr marL="342900" indent="-342900">
-                  <a:buAutoNum type="alphaLcPeriod"/>
-                </a:pPr>
-                <a:r>
-                  <a:rPr lang="en-US" sz="2000" dirty="0">
-                    <a:solidFill>
-                      <a:schemeClr val="accent6">
-                        <a:lumMod val="50000"/>
-                      </a:schemeClr>
-                    </a:solidFill>
-                    <a:latin typeface="Times New Roman" panose="02020603050405020304" pitchFamily="18" charset="0"/>
-                    <a:cs typeface="Times New Roman" panose="02020603050405020304" pitchFamily="18" charset="0"/>
-                  </a:rPr>
-                  <a:t>Find </a:t>
-                </a:r>
-                <a14:m>
-                  <m:oMath xmlns:m="http://schemas.openxmlformats.org/officeDocument/2006/math">
-                    <m:r>
-                      <a:rPr lang="el-GR" sz="2000" b="0" i="1" dirty="0" smtClean="0">
-                        <a:solidFill>
-                          <a:schemeClr val="accent6">
-                            <a:lumMod val="50000"/>
-                          </a:schemeClr>
-                        </a:solidFill>
-                        <a:latin typeface="Cambria Math" panose="02040503050406030204" pitchFamily="18" charset="0"/>
-                        <a:cs typeface="Times New Roman" panose="02020603050405020304" pitchFamily="18" charset="0"/>
-                      </a:rPr>
-                      <m:t>𝜆</m:t>
-                    </m:r>
-                    <m:r>
-                      <a:rPr lang="en-US" sz="2000" b="0" i="1" dirty="0">
-                        <a:solidFill>
-                          <a:schemeClr val="accent6">
-                            <a:lumMod val="50000"/>
-                          </a:schemeClr>
-                        </a:solidFill>
-                        <a:latin typeface="Cambria Math" panose="02040503050406030204" pitchFamily="18" charset="0"/>
-                        <a:cs typeface="Times New Roman" panose="02020603050405020304" pitchFamily="18" charset="0"/>
-                      </a:rPr>
-                      <m:t>=</m:t>
-                    </m:r>
-                    <m:func>
-                      <m:funcPr>
-                        <m:ctrlPr>
-                          <a:rPr lang="en-US" sz="2000" b="0" i="0" dirty="0" smtClean="0">
-                            <a:solidFill>
-                              <a:schemeClr val="accent6">
-                                <a:lumMod val="50000"/>
-                              </a:schemeClr>
-                            </a:solidFill>
-                            <a:latin typeface="Cambria Math" panose="02040503050406030204" pitchFamily="18" charset="0"/>
-                            <a:cs typeface="Times New Roman" panose="02020603050405020304" pitchFamily="18" charset="0"/>
-                          </a:rPr>
-                        </m:ctrlPr>
-                      </m:funcPr>
-                      <m:fName>
-                        <m:r>
-                          <m:rPr>
-                            <m:sty m:val="p"/>
-                          </m:rPr>
-                          <a:rPr lang="en-US" sz="2000" b="0" i="0" dirty="0" smtClean="0">
-                            <a:solidFill>
-                              <a:schemeClr val="accent6">
-                                <a:lumMod val="50000"/>
-                              </a:schemeClr>
-                            </a:solidFill>
-                            <a:latin typeface="Cambria Math" panose="02040503050406030204" pitchFamily="18" charset="0"/>
-                            <a:cs typeface="Times New Roman" panose="02020603050405020304" pitchFamily="18" charset="0"/>
-                          </a:rPr>
-                          <m:t>ln</m:t>
-                        </m:r>
-                      </m:fName>
-                      <m:e>
-                        <m:sSub>
-                          <m:sSubPr>
-                            <m:ctrlPr>
-                              <a:rPr lang="en-US" sz="2000" b="0" i="1" dirty="0" smtClean="0">
-                                <a:solidFill>
-                                  <a:schemeClr val="accent6">
-                                    <a:lumMod val="50000"/>
-                                  </a:schemeClr>
-                                </a:solidFill>
-                                <a:latin typeface="Cambria Math" panose="02040503050406030204" pitchFamily="18" charset="0"/>
-                                <a:cs typeface="Times New Roman" panose="02020603050405020304" pitchFamily="18" charset="0"/>
-                              </a:rPr>
-                            </m:ctrlPr>
-                          </m:sSubPr>
-                          <m:e>
-                            <m:r>
-                              <a:rPr lang="en-US" sz="2000" b="0" i="1" dirty="0" smtClean="0">
-                                <a:solidFill>
-                                  <a:schemeClr val="accent6">
-                                    <a:lumMod val="50000"/>
-                                  </a:schemeClr>
-                                </a:solidFill>
-                                <a:latin typeface="Cambria Math" panose="02040503050406030204" pitchFamily="18" charset="0"/>
-                                <a:cs typeface="Times New Roman" panose="02020603050405020304" pitchFamily="18" charset="0"/>
-                              </a:rPr>
-                              <m:t>𝑥</m:t>
-                            </m:r>
-                          </m:e>
-                          <m:sub>
-                            <m:r>
-                              <a:rPr lang="en-US" sz="2000" b="0" i="1" dirty="0" smtClean="0">
-                                <a:solidFill>
-                                  <a:schemeClr val="accent6">
-                                    <a:lumMod val="50000"/>
-                                  </a:schemeClr>
-                                </a:solidFill>
-                                <a:latin typeface="Cambria Math" panose="02040503050406030204" pitchFamily="18" charset="0"/>
-                                <a:cs typeface="Times New Roman" panose="02020603050405020304" pitchFamily="18" charset="0"/>
-                              </a:rPr>
-                              <m:t>𝑚</m:t>
-                            </m:r>
-                          </m:sub>
-                        </m:sSub>
-                      </m:e>
-                    </m:func>
-                  </m:oMath>
-                </a14:m>
-                <a:endParaRPr lang="en-US" sz="2000" dirty="0">
-                  <a:solidFill>
-                    <a:schemeClr val="accent6">
-                      <a:lumMod val="50000"/>
-                    </a:schemeClr>
-                  </a:solidFill>
-                  <a:latin typeface="Times New Roman" panose="02020603050405020304" pitchFamily="18" charset="0"/>
-                  <a:cs typeface="Times New Roman" panose="02020603050405020304" pitchFamily="18" charset="0"/>
-                </a:endParaRPr>
-              </a:p>
-              <a:p>
-                <a:pPr marL="342900" indent="-342900">
-                  <a:buAutoNum type="alphaLcPeriod"/>
-                </a:pPr>
-                <a:r>
-                  <a:rPr lang="en-US" sz="2000" dirty="0">
-                    <a:solidFill>
-                      <a:schemeClr val="accent6">
-                        <a:lumMod val="50000"/>
-                      </a:schemeClr>
-                    </a:solidFill>
-                    <a:latin typeface="Times New Roman" panose="02020603050405020304" pitchFamily="18" charset="0"/>
-                    <a:ea typeface="Yu Gothic" panose="020B0400000000000000" pitchFamily="34" charset="-128"/>
-                    <a:cs typeface="Times New Roman" panose="02020603050405020304" pitchFamily="18" charset="0"/>
-                  </a:rPr>
-                  <a:t>Find </a:t>
-                </a:r>
-                <a14:m>
-                  <m:oMath xmlns:m="http://schemas.openxmlformats.org/officeDocument/2006/math">
-                    <m:sSup>
-                      <m:sSupPr>
-                        <m:ctrlPr>
-                          <a:rPr lang="en-US" sz="2000" b="0" i="1" smtClean="0">
-                            <a:solidFill>
-                              <a:schemeClr val="accent6">
-                                <a:lumMod val="50000"/>
-                              </a:schemeClr>
-                            </a:solidFill>
-                            <a:latin typeface="Cambria Math" panose="02040503050406030204" pitchFamily="18" charset="0"/>
-                            <a:ea typeface="Yu Gothic" panose="020B0400000000000000" pitchFamily="34" charset="-128"/>
-                            <a:cs typeface="Times New Roman" panose="02020603050405020304" pitchFamily="18" charset="0"/>
-                          </a:rPr>
-                        </m:ctrlPr>
-                      </m:sSupPr>
-                      <m:e>
-                        <m:r>
-                          <a:rPr lang="en-US" sz="2000" b="0" i="1" smtClean="0">
-                            <a:solidFill>
-                              <a:schemeClr val="accent6">
-                                <a:lumMod val="50000"/>
-                              </a:schemeClr>
-                            </a:solidFill>
-                            <a:latin typeface="Cambria Math" panose="02040503050406030204" pitchFamily="18" charset="0"/>
-                            <a:ea typeface="Yu Gothic" panose="020B0400000000000000" pitchFamily="34" charset="-128"/>
-                            <a:cs typeface="Times New Roman" panose="02020603050405020304" pitchFamily="18" charset="0"/>
-                          </a:rPr>
-                          <m:t>𝜁</m:t>
-                        </m:r>
-                      </m:e>
-                      <m:sup>
-                        <m:r>
-                          <a:rPr lang="en-US" sz="2000" b="0" i="1" smtClean="0">
-                            <a:solidFill>
-                              <a:schemeClr val="accent6">
-                                <a:lumMod val="50000"/>
-                              </a:schemeClr>
-                            </a:solidFill>
-                            <a:latin typeface="Cambria Math" panose="02040503050406030204" pitchFamily="18" charset="0"/>
-                            <a:ea typeface="Yu Gothic" panose="020B0400000000000000" pitchFamily="34" charset="-128"/>
-                            <a:cs typeface="Times New Roman" panose="02020603050405020304" pitchFamily="18" charset="0"/>
-                          </a:rPr>
-                          <m:t>2</m:t>
-                        </m:r>
-                      </m:sup>
-                    </m:sSup>
-                    <m:r>
-                      <a:rPr lang="en-US" sz="2000" b="0" i="0" smtClean="0">
-                        <a:solidFill>
-                          <a:schemeClr val="accent6">
-                            <a:lumMod val="50000"/>
-                          </a:schemeClr>
-                        </a:solidFill>
-                        <a:latin typeface="Cambria Math" panose="02040503050406030204" pitchFamily="18" charset="0"/>
-                        <a:ea typeface="Yu Gothic" panose="020B0400000000000000" pitchFamily="34" charset="-128"/>
-                        <a:cs typeface="Times New Roman" panose="02020603050405020304" pitchFamily="18" charset="0"/>
-                      </a:rPr>
-                      <m:t>=</m:t>
-                    </m:r>
-                    <m:r>
-                      <m:rPr>
-                        <m:sty m:val="p"/>
-                      </m:rPr>
-                      <a:rPr lang="en-US" sz="2000" b="0" i="0" smtClean="0">
-                        <a:solidFill>
-                          <a:schemeClr val="accent6">
-                            <a:lumMod val="50000"/>
-                          </a:schemeClr>
-                        </a:solidFill>
-                        <a:latin typeface="Cambria Math" panose="02040503050406030204" pitchFamily="18" charset="0"/>
-                        <a:ea typeface="Yu Gothic" panose="020B0400000000000000" pitchFamily="34" charset="-128"/>
-                        <a:cs typeface="Times New Roman" panose="02020603050405020304" pitchFamily="18" charset="0"/>
-                      </a:rPr>
-                      <m:t>ln</m:t>
-                    </m:r>
-                    <m:r>
-                      <a:rPr lang="en-US" sz="2000" b="0" i="0" smtClean="0">
-                        <a:solidFill>
-                          <a:schemeClr val="accent6">
-                            <a:lumMod val="50000"/>
-                          </a:schemeClr>
-                        </a:solidFill>
-                        <a:latin typeface="Cambria Math" panose="02040503050406030204" pitchFamily="18" charset="0"/>
-                        <a:ea typeface="Yu Gothic" panose="020B0400000000000000" pitchFamily="34" charset="-128"/>
-                        <a:cs typeface="Times New Roman" panose="02020603050405020304" pitchFamily="18" charset="0"/>
-                      </a:rPr>
-                      <m:t> </m:t>
-                    </m:r>
-                    <m:d>
-                      <m:dPr>
-                        <m:ctrlPr>
-                          <a:rPr lang="en-US" sz="2000" b="0" i="1" smtClean="0">
-                            <a:solidFill>
-                              <a:schemeClr val="accent6">
-                                <a:lumMod val="50000"/>
-                              </a:schemeClr>
-                            </a:solidFill>
-                            <a:latin typeface="Cambria Math" panose="02040503050406030204" pitchFamily="18" charset="0"/>
-                            <a:ea typeface="Yu Gothic" panose="020B0400000000000000" pitchFamily="34" charset="-128"/>
-                            <a:cs typeface="Times New Roman" panose="02020603050405020304" pitchFamily="18" charset="0"/>
-                          </a:rPr>
-                        </m:ctrlPr>
-                      </m:dPr>
-                      <m:e>
-                        <m:r>
-                          <a:rPr lang="en-US" sz="2000" b="0" i="1" smtClean="0">
-                            <a:solidFill>
-                              <a:schemeClr val="accent6">
-                                <a:lumMod val="50000"/>
-                              </a:schemeClr>
-                            </a:solidFill>
-                            <a:latin typeface="Cambria Math" panose="02040503050406030204" pitchFamily="18" charset="0"/>
-                            <a:ea typeface="Yu Gothic" panose="020B0400000000000000" pitchFamily="34" charset="-128"/>
-                            <a:cs typeface="Times New Roman" panose="02020603050405020304" pitchFamily="18" charset="0"/>
-                          </a:rPr>
-                          <m:t>1+</m:t>
-                        </m:r>
-                        <m:sSubSup>
-                          <m:sSubSupPr>
-                            <m:ctrlPr>
-                              <a:rPr lang="en-US" sz="2000" b="0" i="1" smtClean="0">
-                                <a:solidFill>
-                                  <a:schemeClr val="accent6">
-                                    <a:lumMod val="50000"/>
-                                  </a:schemeClr>
-                                </a:solidFill>
-                                <a:latin typeface="Cambria Math" panose="02040503050406030204" pitchFamily="18" charset="0"/>
-                                <a:ea typeface="Yu Gothic" panose="020B0400000000000000" pitchFamily="34" charset="-128"/>
-                                <a:cs typeface="Times New Roman" panose="02020603050405020304" pitchFamily="18" charset="0"/>
-                              </a:rPr>
-                            </m:ctrlPr>
-                          </m:sSubSupPr>
-                          <m:e>
-                            <m:r>
-                              <a:rPr lang="en-US" sz="2000" b="0" i="1" smtClean="0">
-                                <a:solidFill>
-                                  <a:schemeClr val="accent6">
-                                    <a:lumMod val="50000"/>
-                                  </a:schemeClr>
-                                </a:solidFill>
-                                <a:latin typeface="Cambria Math" panose="02040503050406030204" pitchFamily="18" charset="0"/>
-                                <a:ea typeface="Yu Gothic" panose="020B0400000000000000" pitchFamily="34" charset="-128"/>
-                                <a:cs typeface="Times New Roman" panose="02020603050405020304" pitchFamily="18" charset="0"/>
-                              </a:rPr>
-                              <m:t>𝛿</m:t>
-                            </m:r>
-                          </m:e>
-                          <m:sub>
-                            <m:r>
-                              <a:rPr lang="en-US" sz="2000" b="0" i="1" smtClean="0">
-                                <a:solidFill>
-                                  <a:schemeClr val="accent6">
-                                    <a:lumMod val="50000"/>
-                                  </a:schemeClr>
-                                </a:solidFill>
-                                <a:latin typeface="Cambria Math" panose="02040503050406030204" pitchFamily="18" charset="0"/>
-                                <a:ea typeface="Yu Gothic" panose="020B0400000000000000" pitchFamily="34" charset="-128"/>
-                                <a:cs typeface="Times New Roman" panose="02020603050405020304" pitchFamily="18" charset="0"/>
-                              </a:rPr>
-                              <m:t>𝑋</m:t>
-                            </m:r>
-                          </m:sub>
-                          <m:sup>
-                            <m:r>
-                              <a:rPr lang="en-US" sz="2000" b="0" i="1" smtClean="0">
-                                <a:solidFill>
-                                  <a:schemeClr val="accent6">
-                                    <a:lumMod val="50000"/>
-                                  </a:schemeClr>
-                                </a:solidFill>
-                                <a:latin typeface="Cambria Math" panose="02040503050406030204" pitchFamily="18" charset="0"/>
-                                <a:ea typeface="Yu Gothic" panose="020B0400000000000000" pitchFamily="34" charset="-128"/>
-                                <a:cs typeface="Times New Roman" panose="02020603050405020304" pitchFamily="18" charset="0"/>
-                              </a:rPr>
-                              <m:t>2</m:t>
-                            </m:r>
-                          </m:sup>
-                        </m:sSubSup>
-                      </m:e>
-                    </m:d>
-                  </m:oMath>
-                </a14:m>
-                <a:endParaRPr lang="en-US" sz="2000" dirty="0">
-                  <a:solidFill>
-                    <a:schemeClr val="accent6">
-                      <a:lumMod val="50000"/>
-                    </a:schemeClr>
-                  </a:solidFill>
-                  <a:latin typeface="Times New Roman" panose="02020603050405020304" pitchFamily="18" charset="0"/>
-                  <a:ea typeface="Yu Gothic" panose="020B0400000000000000" pitchFamily="34" charset="-128"/>
-                  <a:cs typeface="Times New Roman" panose="02020603050405020304" pitchFamily="18" charset="0"/>
-                </a:endParaRPr>
-              </a:p>
-              <a:p>
-                <a:pPr marL="342900" indent="-342900">
-                  <a:buAutoNum type="alphaLcPeriod"/>
-                </a:pPr>
-                <a:r>
-                  <a:rPr lang="en-US" sz="2000" dirty="0">
-                    <a:solidFill>
-                      <a:schemeClr val="accent6">
-                        <a:lumMod val="50000"/>
-                      </a:schemeClr>
-                    </a:solidFill>
-                    <a:latin typeface="Times New Roman" panose="02020603050405020304" pitchFamily="18" charset="0"/>
-                    <a:ea typeface="Yu Gothic" panose="020B0400000000000000" pitchFamily="34" charset="-128"/>
-                    <a:cs typeface="Times New Roman" panose="02020603050405020304" pitchFamily="18" charset="0"/>
-                  </a:rPr>
-                  <a:t>Find </a:t>
-                </a:r>
-                <a14:m>
-                  <m:oMath xmlns:m="http://schemas.openxmlformats.org/officeDocument/2006/math">
-                    <m:r>
-                      <m:rPr>
-                        <m:nor/>
-                      </m:rPr>
-                      <a:rPr lang="en-US" sz="2000" i="0" dirty="0">
-                        <a:solidFill>
-                          <a:schemeClr val="accent6">
-                            <a:lumMod val="50000"/>
-                          </a:schemeClr>
-                        </a:solidFill>
-                        <a:latin typeface="Cambria Math" panose="02040503050406030204" pitchFamily="18" charset="0"/>
-                        <a:ea typeface="Yu Gothic" panose="020B0400000000000000" pitchFamily="34" charset="-128"/>
-                        <a:cs typeface="Arial" panose="020B0604020202020204" pitchFamily="34" charset="0"/>
-                      </a:rPr>
-                      <m:t>P(T</m:t>
-                    </m:r>
-                    <m:r>
-                      <a:rPr lang="en-US" sz="2000" b="0" i="1" dirty="0">
-                        <a:solidFill>
-                          <a:schemeClr val="accent6">
-                            <a:lumMod val="50000"/>
-                          </a:schemeClr>
-                        </a:solidFill>
-                        <a:latin typeface="Cambria Math" panose="02040503050406030204" pitchFamily="18" charset="0"/>
-                        <a:ea typeface="Yu Gothic" panose="020B0400000000000000" pitchFamily="34" charset="-128"/>
-                        <a:cs typeface="Arial" panose="020B0604020202020204" pitchFamily="34" charset="0"/>
-                      </a:rPr>
-                      <m:t>≤</m:t>
-                    </m:r>
-                    <m:sSub>
-                      <m:sSubPr>
-                        <m:ctrlPr>
-                          <a:rPr lang="en-US" sz="2000" b="0" i="1" dirty="0">
-                            <a:solidFill>
-                              <a:schemeClr val="accent6">
-                                <a:lumMod val="50000"/>
-                              </a:schemeClr>
-                            </a:solidFill>
-                            <a:latin typeface="Cambria Math" panose="02040503050406030204" pitchFamily="18" charset="0"/>
-                            <a:ea typeface="Yu Gothic" panose="020B0400000000000000" pitchFamily="34" charset="-128"/>
-                            <a:cs typeface="Arial" panose="020B0604020202020204" pitchFamily="34" charset="0"/>
-                          </a:rPr>
-                        </m:ctrlPr>
-                      </m:sSubPr>
-                      <m:e>
-                        <m:r>
-                          <a:rPr lang="en-US" sz="2000" b="0" i="1" dirty="0">
-                            <a:solidFill>
-                              <a:schemeClr val="accent6">
-                                <a:lumMod val="50000"/>
-                              </a:schemeClr>
-                            </a:solidFill>
-                            <a:latin typeface="Cambria Math" panose="02040503050406030204" pitchFamily="18" charset="0"/>
-                            <a:ea typeface="Yu Gothic" panose="020B0400000000000000" pitchFamily="34" charset="-128"/>
-                            <a:cs typeface="Arial" panose="020B0604020202020204" pitchFamily="34" charset="0"/>
-                          </a:rPr>
-                          <m:t>𝑡</m:t>
-                        </m:r>
-                      </m:e>
-                      <m:sub>
-                        <m:r>
-                          <a:rPr lang="en-US" sz="2000" b="0" i="1" dirty="0">
-                            <a:solidFill>
-                              <a:schemeClr val="accent6">
-                                <a:lumMod val="50000"/>
-                              </a:schemeClr>
-                            </a:solidFill>
-                            <a:latin typeface="Cambria Math" panose="02040503050406030204" pitchFamily="18" charset="0"/>
-                            <a:ea typeface="Yu Gothic" panose="020B0400000000000000" pitchFamily="34" charset="-128"/>
-                            <a:cs typeface="Arial" panose="020B0604020202020204" pitchFamily="34" charset="0"/>
-                          </a:rPr>
-                          <m:t>0</m:t>
-                        </m:r>
-                      </m:sub>
-                    </m:sSub>
-                    <m:r>
-                      <a:rPr lang="en-US" sz="2000" b="0" i="1" dirty="0">
-                        <a:solidFill>
-                          <a:schemeClr val="accent6">
-                            <a:lumMod val="50000"/>
-                          </a:schemeClr>
-                        </a:solidFill>
-                        <a:latin typeface="Cambria Math" panose="02040503050406030204" pitchFamily="18" charset="0"/>
-                        <a:ea typeface="Yu Gothic" panose="020B0400000000000000" pitchFamily="34" charset="-128"/>
-                        <a:cs typeface="Arial" panose="020B0604020202020204" pitchFamily="34" charset="0"/>
-                      </a:rPr>
-                      <m:t>)</m:t>
-                    </m:r>
-                  </m:oMath>
-                </a14:m>
-                <a:endParaRPr lang="en-US" sz="2000" dirty="0">
-                  <a:solidFill>
-                    <a:schemeClr val="accent6">
-                      <a:lumMod val="50000"/>
-                    </a:schemeClr>
-                  </a:solidFill>
-                  <a:latin typeface="Times New Roman" panose="02020603050405020304" pitchFamily="18" charset="0"/>
-                  <a:ea typeface="Yu Gothic" panose="020B0400000000000000" pitchFamily="34" charset="-128"/>
-                  <a:cs typeface="Times New Roman" panose="02020603050405020304" pitchFamily="18" charset="0"/>
-                </a:endParaRPr>
-              </a:p>
-              <a:p>
-                <a:pPr marL="342900" indent="-342900">
-                  <a:buAutoNum type="alphaLcPeriod"/>
-                </a:pPr>
-                <a:r>
-                  <a:rPr lang="en-US" sz="2000" dirty="0">
-                    <a:solidFill>
-                      <a:schemeClr val="accent6">
-                        <a:lumMod val="50000"/>
-                      </a:schemeClr>
-                    </a:solidFill>
-                    <a:latin typeface="Times New Roman" panose="02020603050405020304" pitchFamily="18" charset="0"/>
-                    <a:ea typeface="Yu Gothic" panose="020B0400000000000000" pitchFamily="34" charset="-128"/>
-                    <a:cs typeface="Times New Roman" panose="02020603050405020304" pitchFamily="18" charset="0"/>
-                  </a:rPr>
-                  <a:t>Solve for </a:t>
-                </a:r>
-                <a14:m>
-                  <m:oMath xmlns:m="http://schemas.openxmlformats.org/officeDocument/2006/math">
-                    <m:sSub>
-                      <m:sSubPr>
-                        <m:ctrlPr>
-                          <a:rPr lang="en-US" sz="2000" b="0" i="1">
-                            <a:solidFill>
-                              <a:schemeClr val="accent6">
-                                <a:lumMod val="50000"/>
-                              </a:schemeClr>
-                            </a:solidFill>
-                            <a:latin typeface="Cambria Math" panose="02040503050406030204" pitchFamily="18" charset="0"/>
-                            <a:ea typeface="Yu Gothic" panose="020B0400000000000000" pitchFamily="34" charset="-128"/>
-                            <a:cs typeface="Times New Roman" panose="02020603050405020304" pitchFamily="18" charset="0"/>
-                          </a:rPr>
-                        </m:ctrlPr>
-                      </m:sSubPr>
-                      <m:e>
-                        <m:r>
-                          <a:rPr lang="en-US" sz="2000" b="0" i="1">
-                            <a:solidFill>
-                              <a:schemeClr val="accent6">
-                                <a:lumMod val="50000"/>
-                              </a:schemeClr>
-                            </a:solidFill>
-                            <a:latin typeface="Cambria Math" panose="02040503050406030204" pitchFamily="18" charset="0"/>
-                            <a:ea typeface="Yu Gothic" panose="020B0400000000000000" pitchFamily="34" charset="-128"/>
-                            <a:cs typeface="Times New Roman" panose="02020603050405020304" pitchFamily="18" charset="0"/>
-                          </a:rPr>
-                          <m:t>𝑡</m:t>
-                        </m:r>
-                      </m:e>
-                      <m:sub>
-                        <m:r>
-                          <a:rPr lang="en-US" sz="2000" b="0" i="1">
-                            <a:solidFill>
-                              <a:schemeClr val="accent6">
-                                <a:lumMod val="50000"/>
-                              </a:schemeClr>
-                            </a:solidFill>
-                            <a:latin typeface="Cambria Math" panose="02040503050406030204" pitchFamily="18" charset="0"/>
-                            <a:ea typeface="Yu Gothic" panose="020B0400000000000000" pitchFamily="34" charset="-128"/>
-                            <a:cs typeface="Times New Roman" panose="02020603050405020304" pitchFamily="18" charset="0"/>
-                          </a:rPr>
-                          <m:t>0</m:t>
-                        </m:r>
-                      </m:sub>
-                    </m:sSub>
-                  </m:oMath>
-                </a14:m>
-                <a:r>
-                  <a:rPr lang="en-US" sz="2000" dirty="0">
-                    <a:solidFill>
-                      <a:schemeClr val="accent6">
-                        <a:lumMod val="50000"/>
-                      </a:schemeClr>
-                    </a:solidFill>
-                    <a:latin typeface="Times New Roman" panose="02020603050405020304" pitchFamily="18" charset="0"/>
-                    <a:ea typeface="Yu Gothic" panose="020B0400000000000000" pitchFamily="34" charset="-128"/>
-                    <a:cs typeface="Times New Roman" panose="02020603050405020304" pitchFamily="18" charset="0"/>
-                  </a:rPr>
-                  <a:t> using </a:t>
-                </a:r>
-                <a14:m>
-                  <m:oMath xmlns:m="http://schemas.openxmlformats.org/officeDocument/2006/math">
-                    <m:f>
-                      <m:fPr>
-                        <m:ctrlPr>
-                          <a:rPr lang="en-US" sz="2000" b="0" i="1">
-                            <a:solidFill>
-                              <a:schemeClr val="accent6">
-                                <a:lumMod val="50000"/>
-                              </a:schemeClr>
-                            </a:solidFill>
-                            <a:latin typeface="Cambria Math" panose="02040503050406030204" pitchFamily="18" charset="0"/>
-                            <a:ea typeface="Yu Gothic" panose="020B0400000000000000" pitchFamily="34" charset="-128"/>
-                            <a:cs typeface="Times New Roman" panose="02020603050405020304" pitchFamily="18" charset="0"/>
-                          </a:rPr>
-                        </m:ctrlPr>
-                      </m:fPr>
-                      <m:num>
-                        <m:r>
-                          <a:rPr lang="en-US" sz="2000" b="0" i="1">
-                            <a:solidFill>
-                              <a:schemeClr val="accent6">
-                                <a:lumMod val="50000"/>
-                              </a:schemeClr>
-                            </a:solidFill>
-                            <a:latin typeface="Cambria Math" panose="02040503050406030204" pitchFamily="18" charset="0"/>
-                            <a:ea typeface="Yu Gothic" panose="020B0400000000000000" pitchFamily="34" charset="-128"/>
-                            <a:cs typeface="Times New Roman" panose="02020603050405020304" pitchFamily="18" charset="0"/>
-                          </a:rPr>
-                          <m:t>𝜙</m:t>
-                        </m:r>
-                        <m:d>
-                          <m:dPr>
-                            <m:ctrlPr>
-                              <a:rPr lang="en-US" sz="2000" b="0" i="1">
-                                <a:solidFill>
-                                  <a:schemeClr val="accent6">
-                                    <a:lumMod val="50000"/>
-                                  </a:schemeClr>
-                                </a:solidFill>
-                                <a:latin typeface="Cambria Math" panose="02040503050406030204" pitchFamily="18" charset="0"/>
-                                <a:ea typeface="Yu Gothic" panose="020B0400000000000000" pitchFamily="34" charset="-128"/>
-                                <a:cs typeface="Times New Roman" panose="02020603050405020304" pitchFamily="18" charset="0"/>
-                              </a:rPr>
-                            </m:ctrlPr>
-                          </m:dPr>
-                          <m:e>
-                            <m:r>
-                              <a:rPr lang="en-US" sz="2000" b="0" i="1">
-                                <a:solidFill>
-                                  <a:schemeClr val="accent6">
-                                    <a:lumMod val="50000"/>
-                                  </a:schemeClr>
-                                </a:solidFill>
-                                <a:latin typeface="Cambria Math" panose="02040503050406030204" pitchFamily="18" charset="0"/>
-                                <a:ea typeface="Yu Gothic" panose="020B0400000000000000" pitchFamily="34" charset="-128"/>
-                                <a:cs typeface="Times New Roman" panose="02020603050405020304" pitchFamily="18" charset="0"/>
-                              </a:rPr>
-                              <m:t>𝑙𝑛</m:t>
-                            </m:r>
-                            <m:d>
-                              <m:dPr>
-                                <m:ctrlPr>
-                                  <a:rPr lang="en-US" sz="2000" i="1">
-                                    <a:solidFill>
-                                      <a:schemeClr val="accent6">
-                                        <a:lumMod val="50000"/>
-                                      </a:schemeClr>
-                                    </a:solidFill>
-                                    <a:latin typeface="Cambria Math" panose="02040503050406030204" pitchFamily="18" charset="0"/>
-                                    <a:ea typeface="Yu Gothic" panose="020B0400000000000000" pitchFamily="34" charset="-128"/>
-                                    <a:cs typeface="Times New Roman" panose="02020603050405020304" pitchFamily="18" charset="0"/>
-                                  </a:rPr>
-                                </m:ctrlPr>
-                              </m:dPr>
-                              <m:e>
-                                <m:sSub>
-                                  <m:sSubPr>
-                                    <m:ctrlPr>
-                                      <a:rPr lang="en-US" sz="2000" b="0" i="1">
-                                        <a:solidFill>
-                                          <a:schemeClr val="accent6">
-                                            <a:lumMod val="50000"/>
-                                          </a:schemeClr>
-                                        </a:solidFill>
-                                        <a:latin typeface="Cambria Math" panose="02040503050406030204" pitchFamily="18" charset="0"/>
-                                        <a:ea typeface="Yu Gothic" panose="020B0400000000000000" pitchFamily="34" charset="-128"/>
-                                        <a:cs typeface="Times New Roman" panose="02020603050405020304" pitchFamily="18" charset="0"/>
-                                      </a:rPr>
-                                    </m:ctrlPr>
-                                  </m:sSubPr>
-                                  <m:e>
-                                    <m:r>
-                                      <a:rPr lang="en-US" sz="2000" b="0" i="1">
-                                        <a:solidFill>
-                                          <a:schemeClr val="accent6">
-                                            <a:lumMod val="50000"/>
-                                          </a:schemeClr>
-                                        </a:solidFill>
-                                        <a:latin typeface="Cambria Math" panose="02040503050406030204" pitchFamily="18" charset="0"/>
-                                        <a:ea typeface="Yu Gothic" panose="020B0400000000000000" pitchFamily="34" charset="-128"/>
-                                        <a:cs typeface="Times New Roman" panose="02020603050405020304" pitchFamily="18" charset="0"/>
-                                      </a:rPr>
-                                      <m:t>𝑡</m:t>
-                                    </m:r>
-                                  </m:e>
-                                  <m:sub>
-                                    <m:r>
-                                      <a:rPr lang="en-US" sz="2000" b="0" i="1">
-                                        <a:solidFill>
-                                          <a:schemeClr val="accent6">
-                                            <a:lumMod val="50000"/>
-                                          </a:schemeClr>
-                                        </a:solidFill>
-                                        <a:latin typeface="Cambria Math" panose="02040503050406030204" pitchFamily="18" charset="0"/>
-                                        <a:ea typeface="Yu Gothic" panose="020B0400000000000000" pitchFamily="34" charset="-128"/>
-                                        <a:cs typeface="Times New Roman" panose="02020603050405020304" pitchFamily="18" charset="0"/>
-                                      </a:rPr>
-                                      <m:t>0</m:t>
-                                    </m:r>
-                                  </m:sub>
-                                </m:sSub>
-                              </m:e>
-                            </m:d>
-                            <m:r>
-                              <a:rPr lang="en-US" sz="2000" b="0" i="1">
-                                <a:solidFill>
-                                  <a:schemeClr val="accent6">
-                                    <a:lumMod val="50000"/>
-                                  </a:schemeClr>
-                                </a:solidFill>
-                                <a:latin typeface="Cambria Math" panose="02040503050406030204" pitchFamily="18" charset="0"/>
-                                <a:ea typeface="Yu Gothic" panose="020B0400000000000000" pitchFamily="34" charset="-128"/>
-                                <a:cs typeface="Times New Roman" panose="02020603050405020304" pitchFamily="18" charset="0"/>
-                              </a:rPr>
-                              <m:t>−</m:t>
-                            </m:r>
-                            <m:r>
-                              <a:rPr lang="en-US" sz="2000" b="0" i="1">
-                                <a:solidFill>
-                                  <a:schemeClr val="accent6">
-                                    <a:lumMod val="50000"/>
-                                  </a:schemeClr>
-                                </a:solidFill>
-                                <a:latin typeface="Cambria Math" panose="02040503050406030204" pitchFamily="18" charset="0"/>
-                                <a:ea typeface="Yu Gothic" panose="020B0400000000000000" pitchFamily="34" charset="-128"/>
-                                <a:cs typeface="Times New Roman" panose="02020603050405020304" pitchFamily="18" charset="0"/>
-                              </a:rPr>
-                              <m:t>𝜆</m:t>
-                            </m:r>
-                          </m:e>
-                        </m:d>
-                      </m:num>
-                      <m:den>
-                        <m:r>
-                          <m:rPr>
-                            <m:nor/>
-                          </m:rPr>
-                          <a:rPr lang="el-GR" sz="2000" i="0" dirty="0">
-                            <a:solidFill>
-                              <a:schemeClr val="accent6">
-                                <a:lumMod val="50000"/>
-                              </a:schemeClr>
-                            </a:solidFill>
-                            <a:latin typeface="Arial" panose="020B0604020202020204" pitchFamily="34" charset="0"/>
-                            <a:ea typeface="Yu Gothic" panose="020B0400000000000000" pitchFamily="34" charset="-128"/>
-                            <a:cs typeface="Arial" panose="020B0604020202020204" pitchFamily="34" charset="0"/>
-                          </a:rPr>
-                          <m:t>ζ</m:t>
-                        </m:r>
-                      </m:den>
-                    </m:f>
-                    <m:r>
-                      <m:rPr>
-                        <m:nor/>
-                      </m:rPr>
-                      <a:rPr lang="en-US" sz="2000" i="0" dirty="0" smtClean="0">
-                        <a:solidFill>
-                          <a:schemeClr val="accent6">
-                            <a:lumMod val="50000"/>
-                          </a:schemeClr>
-                        </a:solidFill>
-                        <a:latin typeface="Cambria Math" panose="02040503050406030204" pitchFamily="18" charset="0"/>
-                        <a:ea typeface="Yu Gothic" panose="020B0400000000000000" pitchFamily="34" charset="-128"/>
-                        <a:cs typeface="Arial" panose="020B0604020202020204" pitchFamily="34" charset="0"/>
-                      </a:rPr>
-                      <m:t>=P(T</m:t>
-                    </m:r>
-                    <m:r>
-                      <a:rPr lang="en-US" sz="2000" b="0" i="1" dirty="0" smtClean="0">
-                        <a:solidFill>
-                          <a:schemeClr val="accent6">
-                            <a:lumMod val="50000"/>
-                          </a:schemeClr>
-                        </a:solidFill>
-                        <a:latin typeface="Cambria Math" panose="02040503050406030204" pitchFamily="18" charset="0"/>
-                        <a:ea typeface="Yu Gothic" panose="020B0400000000000000" pitchFamily="34" charset="-128"/>
-                        <a:cs typeface="Arial" panose="020B0604020202020204" pitchFamily="34" charset="0"/>
-                      </a:rPr>
-                      <m:t>≤</m:t>
-                    </m:r>
-                    <m:sSub>
-                      <m:sSubPr>
-                        <m:ctrlPr>
-                          <a:rPr lang="en-US" sz="2000" b="0" i="1" dirty="0" smtClean="0">
-                            <a:solidFill>
-                              <a:schemeClr val="accent6">
-                                <a:lumMod val="50000"/>
-                              </a:schemeClr>
-                            </a:solidFill>
-                            <a:latin typeface="Cambria Math" panose="02040503050406030204" pitchFamily="18" charset="0"/>
-                            <a:ea typeface="Yu Gothic" panose="020B0400000000000000" pitchFamily="34" charset="-128"/>
-                            <a:cs typeface="Arial" panose="020B0604020202020204" pitchFamily="34" charset="0"/>
-                          </a:rPr>
-                        </m:ctrlPr>
-                      </m:sSubPr>
-                      <m:e>
-                        <m:r>
-                          <a:rPr lang="en-US" sz="2000" b="0" i="1" dirty="0" smtClean="0">
-                            <a:solidFill>
-                              <a:schemeClr val="accent6">
-                                <a:lumMod val="50000"/>
-                              </a:schemeClr>
-                            </a:solidFill>
-                            <a:latin typeface="Cambria Math" panose="02040503050406030204" pitchFamily="18" charset="0"/>
-                            <a:ea typeface="Yu Gothic" panose="020B0400000000000000" pitchFamily="34" charset="-128"/>
-                            <a:cs typeface="Arial" panose="020B0604020202020204" pitchFamily="34" charset="0"/>
-                          </a:rPr>
-                          <m:t>𝑡</m:t>
-                        </m:r>
-                      </m:e>
-                      <m:sub>
-                        <m:r>
-                          <a:rPr lang="en-US" sz="2000" b="0" i="1" dirty="0" smtClean="0">
-                            <a:solidFill>
-                              <a:schemeClr val="accent6">
-                                <a:lumMod val="50000"/>
-                              </a:schemeClr>
-                            </a:solidFill>
-                            <a:latin typeface="Cambria Math" panose="02040503050406030204" pitchFamily="18" charset="0"/>
-                            <a:ea typeface="Yu Gothic" panose="020B0400000000000000" pitchFamily="34" charset="-128"/>
-                            <a:cs typeface="Arial" panose="020B0604020202020204" pitchFamily="34" charset="0"/>
-                          </a:rPr>
-                          <m:t>0</m:t>
-                        </m:r>
-                      </m:sub>
-                    </m:sSub>
-                    <m:r>
-                      <a:rPr lang="en-US" sz="2000" b="0" i="1" dirty="0" smtClean="0">
-                        <a:solidFill>
-                          <a:schemeClr val="accent6">
-                            <a:lumMod val="50000"/>
-                          </a:schemeClr>
-                        </a:solidFill>
-                        <a:latin typeface="Cambria Math" panose="02040503050406030204" pitchFamily="18" charset="0"/>
-                        <a:ea typeface="Yu Gothic" panose="020B0400000000000000" pitchFamily="34" charset="-128"/>
-                        <a:cs typeface="Arial" panose="020B0604020202020204" pitchFamily="34" charset="0"/>
-                      </a:rPr>
-                      <m:t>)</m:t>
-                    </m:r>
-                  </m:oMath>
-                </a14:m>
-                <a:endParaRPr lang="en-IN" sz="2000" dirty="0">
-                  <a:solidFill>
-                    <a:schemeClr val="accent6">
-                      <a:lumMod val="50000"/>
-                    </a:schemeClr>
-                  </a:solidFill>
-                  <a:latin typeface="Arial" panose="020B0604020202020204" pitchFamily="34" charset="0"/>
-                  <a:cs typeface="Arial" panose="020B0604020202020204" pitchFamily="34" charset="0"/>
-                </a:endParaRPr>
-              </a:p>
-            </p:txBody>
-          </p:sp>
-        </mc:Choice>
-        <mc:Fallback>
-          <p:sp>
-            <p:nvSpPr>
-              <p:cNvPr id="4" name="TextBox 3">
-                <a:extLst>
-                  <a:ext uri="{FF2B5EF4-FFF2-40B4-BE49-F238E27FC236}">
-                    <a16:creationId xmlns:a16="http://schemas.microsoft.com/office/drawing/2014/main" id="{A4180BF0-8840-B2F1-A15D-14388081D309}"/>
-                  </a:ext>
-                </a:extLst>
-              </p:cNvPr>
-              <p:cNvSpPr txBox="1">
-                <a:spLocks noRot="1" noChangeAspect="1" noMove="1" noResize="1" noEditPoints="1" noAdjustHandles="1" noChangeArrowheads="1" noChangeShapeType="1" noTextEdit="1"/>
-              </p:cNvSpPr>
-              <p:nvPr/>
-            </p:nvSpPr>
-            <p:spPr>
-              <a:xfrm>
-                <a:off x="3305740" y="4546299"/>
-                <a:ext cx="8025384" cy="1572610"/>
-              </a:xfrm>
-              <a:prstGeom prst="rect">
-                <a:avLst/>
-              </a:prstGeom>
-              <a:blipFill>
-                <a:blip r:embed="rId3"/>
-                <a:stretch>
-                  <a:fillRect l="-607" t="-2326"/>
+                  <a:fillRect l="-847" t="-876"/>
                 </a:stretch>
               </a:blipFill>
             </p:spPr>
